--- a/嵌入式学习资料/STM32/大三下课堂课件/第九章 ADC原理及应用.pptx
+++ b/嵌入式学习资料/STM32/大三下课堂课件/第九章 ADC原理及应用.pptx
@@ -258,7 +258,7 @@
             <a:fld id="{6887AC20-8C1D-44D7-B35A-E6F76E68648C}" type="datetimeFigureOut">
               <a:rPr lang="zh-CN" altLang="en-US" smtClean="0"/>
               <a:pPr/>
-              <a:t>2026/6/10</a:t>
+              <a:t>2026/7/3</a:t>
             </a:fld>
             <a:endParaRPr lang="zh-CN" altLang="en-US"/>
           </a:p>
@@ -564,7 +564,7 @@
             <a:fld id="{82F288E0-7875-42C4-84C8-98DBBD3BF4D2}" type="datetimeFigureOut">
               <a:rPr lang="zh-CN" altLang="en-US" smtClean="0"/>
               <a:pPr/>
-              <a:t>2026/6/10</a:t>
+              <a:t>2026/7/3</a:t>
             </a:fld>
             <a:endParaRPr lang="zh-CN" altLang="en-US"/>
           </a:p>
@@ -700,7 +700,7 @@
             <a:fld id="{82F288E0-7875-42C4-84C8-98DBBD3BF4D2}" type="datetimeFigureOut">
               <a:rPr lang="zh-CN" altLang="en-US" smtClean="0"/>
               <a:pPr/>
-              <a:t>2026/6/10</a:t>
+              <a:t>2026/7/3</a:t>
             </a:fld>
             <a:endParaRPr lang="zh-CN" altLang="en-US"/>
           </a:p>
@@ -949,7 +949,7 @@
             <a:fld id="{82F288E0-7875-42C4-84C8-98DBBD3BF4D2}" type="datetimeFigureOut">
               <a:rPr lang="zh-CN" altLang="en-US" smtClean="0"/>
               <a:pPr/>
-              <a:t>2026/6/10</a:t>
+              <a:t>2026/7/3</a:t>
             </a:fld>
             <a:endParaRPr lang="zh-CN" altLang="en-US"/>
           </a:p>
@@ -1124,7 +1124,7 @@
             <a:fld id="{82F288E0-7875-42C4-84C8-98DBBD3BF4D2}" type="datetimeFigureOut">
               <a:rPr lang="zh-CN" altLang="en-US" smtClean="0"/>
               <a:pPr/>
-              <a:t>2026/6/10</a:t>
+              <a:t>2026/7/3</a:t>
             </a:fld>
             <a:endParaRPr lang="zh-CN" altLang="en-US"/>
           </a:p>
@@ -1272,7 +1272,7 @@
             <a:fld id="{82F288E0-7875-42C4-84C8-98DBBD3BF4D2}" type="datetimeFigureOut">
               <a:rPr lang="zh-CN" altLang="en-US" smtClean="0"/>
               <a:pPr/>
-              <a:t>2026/6/10</a:t>
+              <a:t>2026/7/3</a:t>
             </a:fld>
             <a:endParaRPr lang="zh-CN" altLang="en-US"/>
           </a:p>
@@ -1372,7 +1372,7 @@
             <a:fld id="{0E6A473D-8055-43E1-A01D-B0413067B7D8}" type="datetimeFigureOut">
               <a:rPr lang="zh-CN" altLang="en-US" smtClean="0"/>
               <a:pPr/>
-              <a:t>2026/6/10</a:t>
+              <a:t>2026/7/3</a:t>
             </a:fld>
             <a:endParaRPr lang="zh-CN" altLang="en-US"/>
           </a:p>
@@ -3198,7 +3198,7 @@
             <a:fld id="{DB75B134-9E54-4233-9AD4-A661A84126CB}" type="datetimeFigureOut">
               <a:rPr lang="zh-CN" altLang="en-US" smtClean="0"/>
               <a:pPr/>
-              <a:t>2026/6/10</a:t>
+              <a:t>2026/7/3</a:t>
             </a:fld>
             <a:endParaRPr lang="zh-CN" altLang="en-US"/>
           </a:p>
@@ -3298,7 +3298,7 @@
             <a:fld id="{82F288E0-7875-42C4-84C8-98DBBD3BF4D2}" type="datetimeFigureOut">
               <a:rPr lang="zh-CN" altLang="en-US" smtClean="0"/>
               <a:pPr/>
-              <a:t>2026/6/10</a:t>
+              <a:t>2026/7/3</a:t>
             </a:fld>
             <a:endParaRPr lang="zh-CN" altLang="en-US"/>
           </a:p>
@@ -3638,7 +3638,7 @@
             <a:fld id="{82F288E0-7875-42C4-84C8-98DBBD3BF4D2}" type="datetimeFigureOut">
               <a:rPr lang="zh-CN" altLang="en-US" smtClean="0"/>
               <a:pPr/>
-              <a:t>2026/6/10</a:t>
+              <a:t>2026/7/3</a:t>
             </a:fld>
             <a:endParaRPr lang="zh-CN" altLang="en-US"/>
           </a:p>
@@ -3825,7 +3825,7 @@
             <a:fld id="{82F288E0-7875-42C4-84C8-98DBBD3BF4D2}" type="datetimeFigureOut">
               <a:rPr lang="zh-CN" altLang="en-US" smtClean="0"/>
               <a:pPr/>
-              <a:t>2026/6/10</a:t>
+              <a:t>2026/7/3</a:t>
             </a:fld>
             <a:endParaRPr lang="zh-CN" altLang="en-US"/>
           </a:p>
@@ -3990,7 +3990,7 @@
             <a:fld id="{82F288E0-7875-42C4-84C8-98DBBD3BF4D2}" type="datetimeFigureOut">
               <a:rPr lang="zh-CN" altLang="en-US" smtClean="0"/>
               <a:pPr/>
-              <a:t>2026/6/10</a:t>
+              <a:t>2026/7/3</a:t>
             </a:fld>
             <a:endParaRPr lang="zh-CN" altLang="en-US"/>
           </a:p>
@@ -4232,7 +4232,7 @@
             <a:fld id="{82F288E0-7875-42C4-84C8-98DBBD3BF4D2}" type="datetimeFigureOut">
               <a:rPr lang="zh-CN" altLang="en-US" smtClean="0"/>
               <a:pPr/>
-              <a:t>2026/6/10</a:t>
+              <a:t>2026/7/3</a:t>
             </a:fld>
             <a:endParaRPr lang="zh-CN" altLang="en-US"/>
           </a:p>
@@ -4458,7 +4458,7 @@
             <a:fld id="{82F288E0-7875-42C4-84C8-98DBBD3BF4D2}" type="datetimeFigureOut">
               <a:rPr lang="zh-CN" altLang="en-US" smtClean="0"/>
               <a:pPr/>
-              <a:t>2026/6/10</a:t>
+              <a:t>2026/7/3</a:t>
             </a:fld>
             <a:endParaRPr lang="zh-CN" altLang="en-US"/>
           </a:p>
@@ -4819,7 +4819,7 @@
             <a:fld id="{82F288E0-7875-42C4-84C8-98DBBD3BF4D2}" type="datetimeFigureOut">
               <a:rPr lang="zh-CN" altLang="en-US" smtClean="0"/>
               <a:pPr/>
-              <a:t>2026/6/10</a:t>
+              <a:t>2026/7/3</a:t>
             </a:fld>
             <a:endParaRPr lang="zh-CN" altLang="en-US"/>
           </a:p>
@@ -4933,7 +4933,7 @@
             <a:fld id="{82F288E0-7875-42C4-84C8-98DBBD3BF4D2}" type="datetimeFigureOut">
               <a:rPr lang="zh-CN" altLang="en-US" smtClean="0"/>
               <a:pPr/>
-              <a:t>2026/6/10</a:t>
+              <a:t>2026/7/3</a:t>
             </a:fld>
             <a:endParaRPr lang="zh-CN" altLang="en-US"/>
           </a:p>
@@ -5141,7 +5141,7 @@
             <a:fld id="{82F288E0-7875-42C4-84C8-98DBBD3BF4D2}" type="datetimeFigureOut">
               <a:rPr lang="zh-CN" altLang="en-US" smtClean="0"/>
               <a:pPr/>
-              <a:t>2026/6/10</a:t>
+              <a:t>2026/7/3</a:t>
             </a:fld>
             <a:endParaRPr lang="zh-CN" altLang="en-US"/>
           </a:p>
@@ -5680,7 +5680,7 @@
             <a:fld id="{0E6A473D-8055-43E1-A01D-B0413067B7D8}" type="datetimeFigureOut">
               <a:rPr lang="zh-CN" altLang="en-US" smtClean="0"/>
               <a:pPr/>
-              <a:t>2026/6/10</a:t>
+              <a:t>2026/7/3</a:t>
             </a:fld>
             <a:endParaRPr lang="zh-CN" altLang="en-US"/>
           </a:p>
@@ -18168,15 +18168,7 @@
             </a:r>
             <a:r>
               <a:rPr lang="en-US" dirty="0"/>
-              <a:t>(“ADC1 = %.3f V \t ADC2 = %.3f V \r\n”,adc1</a:t>
-            </a:r>
-            <a:r>
-              <a:rPr lang="en-US" i="1" dirty="0"/>
-              <a:t>3.3/4096,adc2</a:t>
-            </a:r>
-            <a:r>
-              <a:rPr lang="en-US" dirty="0"/>
-              <a:t>3.3/4096);</a:t>
+              <a:t>("ADC1 = %.3f V \t ADC2 = %.3f V \r\n", adc1 * 3.3 / 4096, adc2 * 3.3 / 4096);</a:t>
             </a:r>
             <a:br>
               <a:rPr lang="en-US" dirty="0"/>
